--- a/Proud_Gallery_기획보고_0515.pptx
+++ b/Proud_Gallery_기획보고_0515.pptx
@@ -19905,7 +19905,7 @@
                           <a:ea typeface="Malgun Gothic" pitchFamily="34" charset="-122"/>
                           <a:cs typeface="Malgun Gothic" pitchFamily="34" charset="-120"/>
                         </a:rPr>
-                        <a:t>홈 피드: 배너 + 탭(전체·개인·그룹) + 카드 그리드, 비로그인 탐색 가능</a:t>
+                        <a:t>홈 피드: 배너 + 탭(전체·개인·그룹·Pick·기획전) + 카드 그리드 / Pick·기획전 탭 → 전체화면 상세로 이동, 비로그인 탐색 가능</a:t>
                       </a:r>
                       <a:endParaRPr lang="en-US" sz="950" dirty="0">
                         <a:latin typeface="Malgun Gothic" charset="0"/>
@@ -20111,7 +20111,7 @@
                           <a:ea typeface="Malgun Gothic" pitchFamily="34" charset="-122"/>
                           <a:cs typeface="Malgun Gothic" pitchFamily="34" charset="-120"/>
                         </a:rPr>
-                        <a:t>이미지 뷰어 · 좋아요 · 저장 · 팔로우 · 공유 · 신고 / 비회원 초대 랜딩(4가지 분기)</a:t>
+                        <a:t>이미지 뷰어(딥줌 최대 4x, 시니어 친화) · 좋아요 · 저장 · 팔로우 · 공유 · 신고 / 비회원 초대 랜딩(4가지 분기)</a:t>
                       </a:r>
                       <a:endParaRPr lang="en-US" sz="950" dirty="0">
                         <a:latin typeface="Malgun Gothic" charset="0"/>
